--- a/assets/pptx/catalog-169.pptx
+++ b/assets/pptx/catalog-169.pptx
@@ -3421,7 +3421,7 @@
                 <a:ea typeface="Ebrima"/>
                 <a:cs typeface="Ebrima"/>
               </a:rPr>
-              <a:t>በደጅህ መጣሁኝ መረጥኩኝ (2x)</a:t>
+              <a:t>በደጅህ መጣሁኝ መረጥኩኝ 2x</a:t>
             </a:r>
           </a:p>
         </p:txBody>
@@ -3506,7 +3506,7 @@
                 <a:ea typeface="Ebrima"/>
                 <a:cs typeface="Ebrima"/>
               </a:rPr>
-              <a:t>ሰማይን ምድርን ከሰራው (2x)</a:t>
+              <a:t>ሰማይን ምድርን ከሰራው 2x</a:t>
             </a:r>
           </a:p>
         </p:txBody>
@@ -3627,7 +3627,7 @@
                 <a:ea typeface="Ebrima"/>
                 <a:cs typeface="Ebrima"/>
               </a:rPr>
-              <a:t>ጌታ ይመጣል አይቀርም አያሳፍርም (2x)</a:t>
+              <a:t>ጌታ ይመጣል አይቀርም አያሳፍርም 2x</a:t>
             </a:r>
           </a:p>
         </p:txBody>
@@ -3712,7 +3712,7 @@
                 <a:ea typeface="Ebrima"/>
                 <a:cs typeface="Ebrima"/>
               </a:rPr>
-              <a:t>መከራዬን ሀዘኔን ያን ጊዜ እረሳዋለሁ (2x)</a:t>
+              <a:t>መከራዬን ሀዘኔን ያን ጊዜ እረሳዋለሁ 2x</a:t>
             </a:r>
           </a:p>
         </p:txBody>
@@ -3779,7 +3779,7 @@
                 <a:ea typeface="Ebrima"/>
                 <a:cs typeface="Ebrima"/>
               </a:rPr>
-              <a:t>እዛ ጋር አለው ዋጋ (2x)</a:t>
+              <a:t>እዛ ጋር አለው ዋጋ 2x</a:t>
             </a:r>
           </a:p>
           <a:p>
